--- a/material/Python/미니프로젝트_텍스트게임만들기.pptx
+++ b/material/Python/미니프로젝트_텍스트게임만들기.pptx
@@ -1,6 +1,6 @@
 
 <file path=ppt/presentation.xml><?xml version="1.0" encoding="utf-8"?>
-<p:presentation xmlns:a="http://schemas.openxmlformats.org/drawingml/2006/main" xmlns:r="http://schemas.openxmlformats.org/officeDocument/2006/relationships" xmlns:p="http://schemas.openxmlformats.org/presentationml/2006/main" saveSubsetFonts="1">
+<p:presentation xmlns:a="http://schemas.openxmlformats.org/drawingml/2006/main" xmlns:r="http://schemas.openxmlformats.org/officeDocument/2006/relationships" xmlns:p="http://schemas.openxmlformats.org/presentationml/2006/main" embedTrueTypeFonts="1" saveSubsetFonts="1">
   <p:sldMasterIdLst>
     <p:sldMasterId id="2147483660" r:id="rId1"/>
   </p:sldMasterIdLst>
@@ -19,6 +19,33 @@
   </p:sldIdLst>
   <p:sldSz cx="12192000" cy="6858000"/>
   <p:notesSz cx="6858000" cy="9144000"/>
+  <p:embeddedFontLst>
+    <p:embeddedFont>
+      <p:font typeface="G마켓 산스 TTF Bold" panose="02000000000000000000" pitchFamily="2" charset="-127"/>
+      <p:bold r:id="rId11"/>
+    </p:embeddedFont>
+    <p:embeddedFont>
+      <p:font typeface="Pretendard Black" panose="02000A03000000020004" pitchFamily="2" charset="-127"/>
+      <p:bold r:id="rId12"/>
+    </p:embeddedFont>
+    <p:embeddedFont>
+      <p:font typeface="Pretendard Light" panose="02000403000000020004" pitchFamily="2" charset="-127"/>
+      <p:regular r:id="rId13"/>
+    </p:embeddedFont>
+    <p:embeddedFont>
+      <p:font typeface="Pretendard Medium" panose="02000603000000020004" pitchFamily="2" charset="-127"/>
+      <p:regular r:id="rId14"/>
+    </p:embeddedFont>
+    <p:embeddedFont>
+      <p:font typeface="Malgun Gothic Semilight" panose="020B0502040204020203" pitchFamily="50" charset="-127"/>
+      <p:regular r:id="rId15"/>
+    </p:embeddedFont>
+    <p:embeddedFont>
+      <p:font typeface="메이플스토리" panose="02000300000000000000" pitchFamily="2" charset="-127"/>
+      <p:regular r:id="rId16"/>
+      <p:bold r:id="rId17"/>
+    </p:embeddedFont>
+  </p:embeddedFontLst>
   <p:defaultTextStyle>
     <a:defPPr>
       <a:defRPr lang="ko-KR"/>
@@ -225,7 +252,7 @@
             <a:fld id="{A13A867C-D490-40C2-AB8D-A60FA70A9BF5}" type="datetimeFigureOut">
               <a:rPr lang="ko-KR" altLang="en-US" smtClean="0"/>
               <a:pPr/>
-              <a:t>2025-07-14</a:t>
+              <a:t>2025-08-21</a:t>
             </a:fld>
             <a:endParaRPr lang="ko-KR" altLang="en-US" dirty="0"/>
           </a:p>
@@ -1396,7 +1423,7 @@
           <a:p>
             <a:fld id="{442BEE3F-2E9A-4FD8-8B8A-8619F3E161C0}" type="datetime1">
               <a:rPr lang="ko-KR" altLang="en-US" smtClean="0"/>
-              <a:t>2025-07-14</a:t>
+              <a:t>2025-08-21</a:t>
             </a:fld>
             <a:endParaRPr lang="ko-KR" altLang="en-US"/>
           </a:p>
@@ -1683,7 +1710,7 @@
           <a:p>
             <a:fld id="{0F78D9C4-20C1-4B15-A116-16DC77AD9A1E}" type="datetime1">
               <a:rPr lang="ko-KR" altLang="en-US" smtClean="0"/>
-              <a:t>2025-07-14</a:t>
+              <a:t>2025-08-21</a:t>
             </a:fld>
             <a:endParaRPr lang="ko-KR" altLang="en-US"/>
           </a:p>
@@ -1858,7 +1885,7 @@
           <a:p>
             <a:fld id="{7F5E23C3-0E3D-4E4E-8486-D7FB4C073DC1}" type="datetime1">
               <a:rPr lang="ko-KR" altLang="en-US" smtClean="0"/>
-              <a:t>2025-07-14</a:t>
+              <a:t>2025-08-21</a:t>
             </a:fld>
             <a:endParaRPr lang="ko-KR" altLang="en-US"/>
           </a:p>
@@ -2187,7 +2214,7 @@
           <a:p>
             <a:fld id="{7F5E23C3-0E3D-4E4E-8486-D7FB4C073DC1}" type="datetime1">
               <a:rPr lang="ko-KR" altLang="en-US" smtClean="0"/>
-              <a:t>2025-07-14</a:t>
+              <a:t>2025-08-21</a:t>
             </a:fld>
             <a:endParaRPr lang="ko-KR" altLang="en-US"/>
           </a:p>
@@ -3122,7 +3149,7 @@
           <a:p>
             <a:fld id="{0F78D9C4-20C1-4B15-A116-16DC77AD9A1E}" type="datetime1">
               <a:rPr lang="ko-KR" altLang="en-US" smtClean="0"/>
-              <a:t>2025-07-14</a:t>
+              <a:t>2025-08-21</a:t>
             </a:fld>
             <a:endParaRPr lang="ko-KR" altLang="en-US"/>
           </a:p>
@@ -3976,7 +4003,7 @@
           <a:p>
             <a:fld id="{76022175-F16A-4A96-8E45-178BE9345AE9}" type="datetime6">
               <a:rPr lang="ko-KR" altLang="en-US" smtClean="0"/>
-              <a:t>2025년 7월</a:t>
+              <a:t>2025년 8월</a:t>
             </a:fld>
             <a:endParaRPr lang="ko-KR" altLang="en-US" dirty="0"/>
           </a:p>
@@ -4262,7 +4289,7 @@
           <a:p>
             <a:fld id="{76022175-F16A-4A96-8E45-178BE9345AE9}" type="datetime6">
               <a:rPr lang="ko-KR" altLang="en-US" smtClean="0"/>
-              <a:t>2025년 7월</a:t>
+              <a:t>2025년 8월</a:t>
             </a:fld>
             <a:endParaRPr lang="ko-KR" altLang="en-US" dirty="0"/>
           </a:p>
@@ -4482,7 +4509,7 @@
           <a:p>
             <a:fld id="{76022175-F16A-4A96-8E45-178BE9345AE9}" type="datetime6">
               <a:rPr lang="ko-KR" altLang="en-US" smtClean="0"/>
-              <a:t>2025년 7월</a:t>
+              <a:t>2025년 8월</a:t>
             </a:fld>
             <a:endParaRPr lang="ko-KR" altLang="en-US" dirty="0"/>
           </a:p>
@@ -4753,7 +4780,7 @@
           <a:p>
             <a:fld id="{76022175-F16A-4A96-8E45-178BE9345AE9}" type="datetime6">
               <a:rPr lang="ko-KR" altLang="en-US" smtClean="0"/>
-              <a:t>2025년 7월</a:t>
+              <a:t>2025년 8월</a:t>
             </a:fld>
             <a:endParaRPr lang="ko-KR" altLang="en-US" dirty="0"/>
           </a:p>
